--- a/Assets/Menu/RegularMenu/Menu.pptx
+++ b/Assets/Menu/RegularMenu/Menu.pptx
@@ -10633,7 +10633,7 @@
         <p:spPr>
           <a:xfrm>
             <a:off x="246660" y="361059"/>
-            <a:ext cx="5595904" cy="3530740"/>
+            <a:ext cx="5595904" cy="4638772"/>
           </a:xfrm>
           <a:prstGeom prst="roundRect">
             <a:avLst>
@@ -10695,8 +10695,8 @@
         </p:nvSpPr>
         <p:spPr>
           <a:xfrm>
-            <a:off x="12223377" y="361058"/>
-            <a:ext cx="5639849" cy="2354446"/>
+            <a:off x="12223377" y="361057"/>
+            <a:ext cx="5639849" cy="2526823"/>
           </a:xfrm>
           <a:prstGeom prst="roundRect">
             <a:avLst>
@@ -10810,7 +10810,7 @@
         </p:nvSpPr>
         <p:spPr>
           <a:xfrm>
-            <a:off x="202714" y="4553782"/>
+            <a:off x="202714" y="5136487"/>
             <a:ext cx="5639850" cy="2360806"/>
           </a:xfrm>
           <a:prstGeom prst="roundRect">
@@ -11065,7 +11065,7 @@
         </p:nvSpPr>
         <p:spPr>
           <a:xfrm>
-            <a:off x="187998" y="5254482"/>
+            <a:off x="187998" y="5837187"/>
             <a:ext cx="4048572" cy="1523450"/>
           </a:xfrm>
           <a:prstGeom prst="rect">
@@ -11124,8 +11124,8 @@
         </p:nvSpPr>
         <p:spPr>
           <a:xfrm>
-            <a:off x="332154" y="1378623"/>
-            <a:ext cx="4038729" cy="2354446"/>
+            <a:off x="361971" y="1338867"/>
+            <a:ext cx="4038729" cy="3600941"/>
           </a:xfrm>
           <a:prstGeom prst="rect">
             <a:avLst/>
@@ -11148,6 +11148,39 @@
                 <a:cs typeface="Calibri"/>
                 <a:sym typeface="Calibri"/>
               </a:rPr>
+              <a:t>Popcorn Chicken</a:t>
+            </a:r>
+          </a:p>
+          <a:p>
+            <a:r>
+              <a:rPr lang="en-US" sz="2700" b="1" dirty="0">
+                <a:latin typeface="Calibri"/>
+                <a:ea typeface="Calibri"/>
+                <a:cs typeface="Calibri"/>
+                <a:sym typeface="Calibri"/>
+              </a:rPr>
+              <a:t>    + Fries</a:t>
+            </a:r>
+          </a:p>
+          <a:p>
+            <a:r>
+              <a:rPr lang="en-US" sz="2700" b="1" dirty="0">
+                <a:latin typeface="Calibri"/>
+                <a:ea typeface="Calibri"/>
+                <a:cs typeface="Calibri"/>
+                <a:sym typeface="Calibri"/>
+              </a:rPr>
+              <a:t>French Fries</a:t>
+            </a:r>
+          </a:p>
+          <a:p>
+            <a:r>
+              <a:rPr lang="en-US" sz="2700" b="1" dirty="0">
+                <a:latin typeface="Calibri"/>
+                <a:ea typeface="Calibri"/>
+                <a:cs typeface="Calibri"/>
+                <a:sym typeface="Calibri"/>
+              </a:rPr>
               <a:t>Pretzels </a:t>
             </a:r>
           </a:p>
@@ -11206,7 +11239,7 @@
         <p:spPr>
           <a:xfrm>
             <a:off x="12262283" y="1064589"/>
-            <a:ext cx="2098588" cy="1523450"/>
+            <a:ext cx="2098588" cy="1938948"/>
           </a:xfrm>
           <a:prstGeom prst="rect">
             <a:avLst/>
@@ -11223,14 +11256,16 @@
           <a:lstStyle/>
           <a:p>
             <a:r>
-              <a:rPr lang="en-US" sz="2700" b="1" dirty="0" err="1">
+              <a:rPr lang="en-US" sz="2700" b="1" dirty="0">
                 <a:latin typeface="Calibri"/>
                 <a:ea typeface="Calibri"/>
                 <a:cs typeface="Calibri"/>
                 <a:sym typeface="Calibri"/>
               </a:rPr>
-              <a:t>Dippin</a:t>
+              <a:t>Dippin’ Dots</a:t>
             </a:r>
+          </a:p>
+          <a:p>
             <a:r>
               <a:rPr lang="en-US" sz="2700" b="1" dirty="0">
                 <a:latin typeface="Calibri"/>
@@ -11238,7 +11273,7 @@
                 <a:cs typeface="Calibri"/>
                 <a:sym typeface="Calibri"/>
               </a:rPr>
-              <a:t>’ Dots</a:t>
+              <a:t>Slushies</a:t>
             </a:r>
           </a:p>
           <a:p>
@@ -11260,25 +11295,7 @@
                 <a:cs typeface="Calibri"/>
                 <a:sym typeface="Calibri"/>
               </a:rPr>
-              <a:t>Fla-</a:t>
-            </a:r>
-            <a:r>
-              <a:rPr lang="en-US" sz="2700" b="1" dirty="0" err="1">
-                <a:latin typeface="Calibri"/>
-                <a:ea typeface="Calibri"/>
-                <a:cs typeface="Calibri"/>
-                <a:sym typeface="Calibri"/>
-              </a:rPr>
-              <a:t>Vor</a:t>
-            </a:r>
-            <a:r>
-              <a:rPr lang="en-US" sz="2700" b="1" dirty="0">
-                <a:latin typeface="Calibri"/>
-                <a:ea typeface="Calibri"/>
-                <a:cs typeface="Calibri"/>
-                <a:sym typeface="Calibri"/>
-              </a:rPr>
-              <a:t>-Ice</a:t>
+              <a:t>Fla-Vor-Ice</a:t>
             </a:r>
           </a:p>
         </p:txBody>
@@ -11538,7 +11555,7 @@
         </p:nvSpPr>
         <p:spPr>
           <a:xfrm>
-            <a:off x="4370884" y="5242254"/>
+            <a:off x="4370884" y="5824959"/>
             <a:ext cx="1303499" cy="1523450"/>
           </a:xfrm>
           <a:prstGeom prst="rect">
@@ -11563,7 +11580,7 @@
                 <a:cs typeface="Calibri"/>
                 <a:sym typeface="Calibri"/>
               </a:rPr>
-              <a:t>$0.50</a:t>
+              <a:t>$1.00</a:t>
             </a:r>
           </a:p>
           <a:p>
@@ -11575,7 +11592,7 @@
                 <a:cs typeface="Calibri"/>
                 <a:sym typeface="Calibri"/>
               </a:rPr>
-              <a:t>$0.50</a:t>
+              <a:t>$1.00</a:t>
             </a:r>
           </a:p>
           <a:p>
@@ -11587,7 +11604,7 @@
                 <a:cs typeface="Calibri"/>
                 <a:sym typeface="Calibri"/>
               </a:rPr>
-              <a:t>$0.50</a:t>
+              <a:t>$1.00</a:t>
             </a:r>
           </a:p>
         </p:txBody>
@@ -11606,8 +11623,8 @@
         </p:nvSpPr>
         <p:spPr>
           <a:xfrm>
-            <a:off x="4370884" y="1378623"/>
-            <a:ext cx="1280708" cy="2354446"/>
+            <a:off x="4370884" y="1338866"/>
+            <a:ext cx="1280708" cy="3600941"/>
           </a:xfrm>
           <a:prstGeom prst="rect">
             <a:avLst/>
@@ -11631,7 +11648,7 @@
                 <a:cs typeface="Calibri"/>
                 <a:sym typeface="Calibri"/>
               </a:rPr>
-              <a:t>$3.00</a:t>
+              <a:t>$4.00</a:t>
             </a:r>
           </a:p>
           <a:p>
@@ -11643,7 +11660,43 @@
                 <a:cs typeface="Calibri"/>
                 <a:sym typeface="Calibri"/>
               </a:rPr>
-              <a:t>$2.50</a:t>
+              <a:t>$7.00</a:t>
+            </a:r>
+          </a:p>
+          <a:p>
+            <a:pPr algn="r"/>
+            <a:r>
+              <a:rPr lang="en-US" sz="2700" b="1" dirty="0">
+                <a:latin typeface="Calibri"/>
+                <a:ea typeface="Calibri"/>
+                <a:cs typeface="Calibri"/>
+                <a:sym typeface="Calibri"/>
+              </a:rPr>
+              <a:t>$4.00</a:t>
+            </a:r>
+          </a:p>
+          <a:p>
+            <a:pPr algn="r"/>
+            <a:r>
+              <a:rPr lang="en-US" sz="2700" b="1" dirty="0">
+                <a:latin typeface="Calibri"/>
+                <a:ea typeface="Calibri"/>
+                <a:cs typeface="Calibri"/>
+                <a:sym typeface="Calibri"/>
+              </a:rPr>
+              <a:t>$3.00</a:t>
+            </a:r>
+          </a:p>
+          <a:p>
+            <a:pPr algn="r"/>
+            <a:r>
+              <a:rPr lang="en-US" sz="2700" b="1" dirty="0">
+                <a:latin typeface="Calibri"/>
+                <a:ea typeface="Calibri"/>
+                <a:cs typeface="Calibri"/>
+                <a:sym typeface="Calibri"/>
+              </a:rPr>
+              <a:t>$3.00</a:t>
             </a:r>
           </a:p>
           <a:p>
@@ -11699,7 +11752,7 @@
         <p:spPr>
           <a:xfrm>
             <a:off x="15463422" y="1064589"/>
-            <a:ext cx="2211659" cy="1523450"/>
+            <a:ext cx="2211659" cy="1938948"/>
           </a:xfrm>
           <a:prstGeom prst="rect">
             <a:avLst/>
@@ -11743,12 +11796,18 @@
               </a:rPr>
               <a:t>$3.00</a:t>
             </a:r>
-            <a:endParaRPr sz="2700" b="1" dirty="0">
-              <a:latin typeface="Calibri"/>
-              <a:ea typeface="Calibri"/>
-              <a:cs typeface="Calibri"/>
-              <a:sym typeface="Calibri"/>
-            </a:endParaRPr>
+          </a:p>
+          <a:p>
+            <a:pPr algn="r"/>
+            <a:r>
+              <a:rPr lang="en-US" sz="2700" b="1" dirty="0">
+                <a:latin typeface="Calibri"/>
+                <a:ea typeface="Calibri"/>
+                <a:cs typeface="Calibri"/>
+                <a:sym typeface="Calibri"/>
+              </a:rPr>
+              <a:t>$3.00</a:t>
+            </a:r>
           </a:p>
           <a:p>
             <a:pPr algn="r"/>

--- a/Assets/Menu/RegularMenu/Menu.pptx
+++ b/Assets/Menu/RegularMenu/Menu.pptx
@@ -10633,7 +10633,7 @@
         <p:spPr>
           <a:xfrm>
             <a:off x="246660" y="361059"/>
-            <a:ext cx="5595904" cy="4638772"/>
+            <a:ext cx="5595904" cy="3530739"/>
           </a:xfrm>
           <a:prstGeom prst="roundRect">
             <a:avLst>
@@ -10810,7 +10810,7 @@
         </p:nvSpPr>
         <p:spPr>
           <a:xfrm>
-            <a:off x="202714" y="5136487"/>
+            <a:off x="246660" y="4633682"/>
             <a:ext cx="5639850" cy="2360806"/>
           </a:xfrm>
           <a:prstGeom prst="roundRect">
@@ -11065,7 +11065,7 @@
         </p:nvSpPr>
         <p:spPr>
           <a:xfrm>
-            <a:off x="187998" y="5837187"/>
+            <a:off x="231944" y="5334382"/>
             <a:ext cx="4048572" cy="1523450"/>
           </a:xfrm>
           <a:prstGeom prst="rect">
@@ -11125,7 +11125,7 @@
         <p:spPr>
           <a:xfrm>
             <a:off x="361971" y="1338867"/>
-            <a:ext cx="4038729" cy="3600941"/>
+            <a:ext cx="4038729" cy="2354446"/>
           </a:xfrm>
           <a:prstGeom prst="rect">
             <a:avLst/>
@@ -11140,39 +11140,6 @@
             <a:spAutoFit/>
           </a:bodyPr>
           <a:lstStyle/>
-          <a:p>
-            <a:r>
-              <a:rPr lang="en-US" sz="2700" b="1" dirty="0">
-                <a:latin typeface="Calibri"/>
-                <a:ea typeface="Calibri"/>
-                <a:cs typeface="Calibri"/>
-                <a:sym typeface="Calibri"/>
-              </a:rPr>
-              <a:t>Popcorn Chicken</a:t>
-            </a:r>
-          </a:p>
-          <a:p>
-            <a:r>
-              <a:rPr lang="en-US" sz="2700" b="1" dirty="0">
-                <a:latin typeface="Calibri"/>
-                <a:ea typeface="Calibri"/>
-                <a:cs typeface="Calibri"/>
-                <a:sym typeface="Calibri"/>
-              </a:rPr>
-              <a:t>    + Fries</a:t>
-            </a:r>
-          </a:p>
-          <a:p>
-            <a:r>
-              <a:rPr lang="en-US" sz="2700" b="1" dirty="0">
-                <a:latin typeface="Calibri"/>
-                <a:ea typeface="Calibri"/>
-                <a:cs typeface="Calibri"/>
-                <a:sym typeface="Calibri"/>
-              </a:rPr>
-              <a:t>French Fries</a:t>
-            </a:r>
-          </a:p>
           <a:p>
             <a:r>
               <a:rPr lang="en-US" sz="2700" b="1" dirty="0">
@@ -11555,7 +11522,7 @@
         </p:nvSpPr>
         <p:spPr>
           <a:xfrm>
-            <a:off x="4370884" y="5824959"/>
+            <a:off x="4414830" y="5322154"/>
             <a:ext cx="1303499" cy="1523450"/>
           </a:xfrm>
           <a:prstGeom prst="rect">
@@ -11624,7 +11591,7 @@
         <p:spPr>
           <a:xfrm>
             <a:off x="4370884" y="1338866"/>
-            <a:ext cx="1280708" cy="3600941"/>
+            <a:ext cx="1280708" cy="2354446"/>
           </a:xfrm>
           <a:prstGeom prst="rect">
             <a:avLst/>
@@ -11639,42 +11606,6 @@
             <a:spAutoFit/>
           </a:bodyPr>
           <a:lstStyle/>
-          <a:p>
-            <a:pPr algn="r"/>
-            <a:r>
-              <a:rPr lang="en-US" sz="2700" b="1" dirty="0">
-                <a:latin typeface="Calibri"/>
-                <a:ea typeface="Calibri"/>
-                <a:cs typeface="Calibri"/>
-                <a:sym typeface="Calibri"/>
-              </a:rPr>
-              <a:t>$4.00</a:t>
-            </a:r>
-          </a:p>
-          <a:p>
-            <a:pPr algn="r"/>
-            <a:r>
-              <a:rPr lang="en-US" sz="2700" b="1" dirty="0">
-                <a:latin typeface="Calibri"/>
-                <a:ea typeface="Calibri"/>
-                <a:cs typeface="Calibri"/>
-                <a:sym typeface="Calibri"/>
-              </a:rPr>
-              <a:t>$7.00</a:t>
-            </a:r>
-          </a:p>
-          <a:p>
-            <a:pPr algn="r"/>
-            <a:r>
-              <a:rPr lang="en-US" sz="2700" b="1" dirty="0">
-                <a:latin typeface="Calibri"/>
-                <a:ea typeface="Calibri"/>
-                <a:cs typeface="Calibri"/>
-                <a:sym typeface="Calibri"/>
-              </a:rPr>
-              <a:t>$4.00</a:t>
-            </a:r>
-          </a:p>
           <a:p>
             <a:pPr algn="r"/>
             <a:r>
